--- a/HP/Doc/수배관도/HP 수배관 260324.pptx
+++ b/HP/Doc/수배관도/HP 수배관 260324.pptx
@@ -208,7 +208,7 @@
           <a:p>
             <a:fld id="{F7B726B6-7BA8-48D6-B5CE-EDF1CF7B0A37}" type="datetimeFigureOut">
               <a:rPr lang="ko-KR" altLang="en-US" smtClean="0"/>
-              <a:t>2026-03-25</a:t>
+              <a:t>2026-03-30</a:t>
             </a:fld>
             <a:endParaRPr lang="ko-KR" altLang="en-US"/>
           </a:p>
